--- a/stage3_neural_networks/01_first_neural_network/Lecture-10-First-Neural-Network.pptx
+++ b/stage3_neural_networks/01_first_neural_network/Lecture-10-First-Neural-Network.pptx
@@ -8310,6 +8310,9 @@
           <a:lstStyle/>
           <a:p>
             <a:r>
+              <a:rPr>
+                <a:latin typeface="Calibri"/>
+              </a:rPr>
               <a:t>AI Basic Training</a:t>
             </a:r>
           </a:p>
@@ -8331,6 +8334,9 @@
           <a:lstStyle/>
           <a:p>
             <a:r>
+              <a:rPr>
+                <a:latin typeface="Calibri"/>
+              </a:rPr>
               <a:t>Lesson 3.1  |  Stage 3: Neural Networks</a:t>
             </a:r>
           </a:p>
@@ -8352,6 +8358,9 @@
           <a:lstStyle/>
           <a:p>
             <a:r>
+              <a:rPr b="1">
+                <a:latin typeface="Calibri"/>
+              </a:rPr>
               <a:t>Your First Neural Network</a:t>
             </a:r>
           </a:p>
@@ -8373,6 +8382,9 @@
           <a:lstStyle/>
           <a:p>
             <a:r>
+              <a:rPr>
+                <a:latin typeface="Calibri"/>
+              </a:rPr>
               <a:t>From sklearn to Keras  -  Deep Learning Begins</a:t>
             </a:r>
           </a:p>
@@ -8412,6 +8424,9 @@
           <a:lstStyle/>
           <a:p>
             <a:r>
+              <a:rPr b="1">
+                <a:latin typeface="Calibri"/>
+              </a:rPr>
               <a:t>Good Training vs Overfitting - Read the Curves</a:t>
             </a:r>
           </a:p>
@@ -8475,6 +8490,9 @@
           <a:lstStyle/>
           <a:p>
             <a:r>
+              <a:rPr>
+                <a:latin typeface="Calibri"/>
+              </a:rPr>
               <a:t/>
             </a:r>
           </a:p>
@@ -8496,31 +8514,41 @@
           <a:lstStyle/>
           <a:p>
             <a:r>
-              <a:rPr sz="1400"/>
+              <a:rPr sz="1400">
+                <a:latin typeface="Calibri"/>
+              </a:rPr>
               <a:t>The loss curves are your</a:t>
             </a:r>
           </a:p>
           <a:p>
             <a:r>
-              <a:rPr sz="1400"/>
+              <a:rPr sz="1400">
+                <a:latin typeface="Calibri"/>
+              </a:rPr>
               <a:t>most important diagnostic</a:t>
             </a:r>
           </a:p>
           <a:p>
             <a:r>
-              <a:rPr sz="1400"/>
+              <a:rPr sz="1400">
+                <a:latin typeface="Calibri"/>
+              </a:rPr>
               <a:t>tool in deep learning.</a:t>
             </a:r>
           </a:p>
           <a:p>
             <a:r>
-              <a:rPr sz="1400"/>
+              <a:rPr sz="1400">
+                <a:latin typeface="Calibri"/>
+              </a:rPr>
               <a:t/>
             </a:r>
           </a:p>
           <a:p>
             <a:r>
-              <a:rPr sz="1400"/>
+              <a:rPr sz="1400">
+                <a:latin typeface="Calibri"/>
+              </a:rPr>
               <a:t>Always plot them.</a:t>
             </a:r>
           </a:p>
@@ -8542,6 +8570,9 @@
           <a:lstStyle/>
           <a:p>
             <a:r>
+              <a:rPr b="1">
+                <a:latin typeface="Calibri"/>
+              </a:rPr>
               <a:t>What to Watch For</a:t>
             </a:r>
           </a:p>
@@ -8563,49 +8594,65 @@
           <a:lstStyle/>
           <a:p>
             <a:r>
-              <a:rPr sz="1400"/>
+              <a:rPr sz="1400">
+                <a:latin typeface="Calibri"/>
+              </a:rPr>
               <a:t>Both curves falling together = good</a:t>
             </a:r>
           </a:p>
           <a:p>
             <a:r>
-              <a:rPr sz="1400"/>
+              <a:rPr sz="1400">
+                <a:latin typeface="Calibri"/>
+              </a:rPr>
               <a:t>  Model is learning, not memorising</a:t>
             </a:r>
           </a:p>
           <a:p>
             <a:r>
-              <a:rPr sz="1400"/>
+              <a:rPr sz="1400">
+                <a:latin typeface="Calibri"/>
+              </a:rPr>
               <a:t/>
             </a:r>
           </a:p>
           <a:p>
             <a:r>
-              <a:rPr sz="1400"/>
+              <a:rPr sz="1400">
+                <a:latin typeface="Calibri"/>
+              </a:rPr>
               <a:t>val_loss rising while train_loss falls</a:t>
             </a:r>
           </a:p>
           <a:p>
             <a:r>
-              <a:rPr sz="1400"/>
+              <a:rPr sz="1400">
+                <a:latin typeface="Calibri"/>
+              </a:rPr>
               <a:t>  = OVERFITTING - stop training</a:t>
             </a:r>
           </a:p>
           <a:p>
             <a:r>
-              <a:rPr sz="1400"/>
+              <a:rPr sz="1400">
+                <a:latin typeface="Calibri"/>
+              </a:rPr>
               <a:t/>
             </a:r>
           </a:p>
           <a:p>
             <a:r>
-              <a:rPr sz="1400"/>
+              <a:rPr sz="1400">
+                <a:latin typeface="Calibri"/>
+              </a:rPr>
               <a:t>Neither curve falling = underfitting</a:t>
             </a:r>
           </a:p>
           <a:p>
             <a:r>
-              <a:rPr sz="1400"/>
+              <a:rPr sz="1400">
+                <a:latin typeface="Calibri"/>
+              </a:rPr>
               <a:t>  Need more capacity or better data</a:t>
             </a:r>
           </a:p>
@@ -8645,6 +8692,9 @@
           <a:lstStyle/>
           <a:p>
             <a:r>
+              <a:rPr b="1">
+                <a:latin typeface="Calibri"/>
+              </a:rPr>
               <a:t>sklearn vs Keras</a:t>
             </a:r>
           </a:p>
@@ -8666,6 +8716,9 @@
           <a:lstStyle/>
           <a:p>
             <a:r>
+              <a:rPr b="1">
+                <a:latin typeface="Calibri"/>
+              </a:rPr>
               <a:t>04</a:t>
             </a:r>
           </a:p>
@@ -8705,6 +8758,9 @@
           <a:lstStyle/>
           <a:p>
             <a:r>
+              <a:rPr b="1">
+                <a:latin typeface="Calibri"/>
+              </a:rPr>
               <a:t>When to Use sklearn vs Keras</a:t>
             </a:r>
           </a:p>
@@ -8768,11 +8824,17 @@
           <a:lstStyle/>
           <a:p>
             <a:r>
+              <a:rPr b="1">
+                <a:latin typeface="Calibri"/>
+              </a:rPr>
               <a:t>Workshop</a:t>
             </a:r>
           </a:p>
           <a:p>
             <a:r>
+              <a:rPr b="1">
+                <a:latin typeface="Calibri"/>
+              </a:rPr>
               <a:t>and Next Steps</a:t>
             </a:r>
           </a:p>
@@ -8794,6 +8856,9 @@
           <a:lstStyle/>
           <a:p>
             <a:r>
+              <a:rPr b="1">
+                <a:latin typeface="Calibri"/>
+              </a:rPr>
               <a:t>05</a:t>
             </a:r>
           </a:p>
@@ -8833,6 +8898,9 @@
           <a:lstStyle/>
           <a:p>
             <a:r>
+              <a:rPr b="1">
+                <a:latin typeface="Calibri"/>
+              </a:rPr>
               <a:t>Workshop: 4 Hands-On Exercises</a:t>
             </a:r>
           </a:p>
@@ -8854,37 +8922,49 @@
           <a:lstStyle/>
           <a:p>
             <a:r>
-              <a:rPr sz="1600"/>
+              <a:rPr sz="1600">
+                <a:latin typeface="Calibri"/>
+              </a:rPr>
               <a:t>Exercise 1:  Dense layer = matrix multiply + bias + activation</a:t>
             </a:r>
           </a:p>
           <a:p>
             <a:r>
-              <a:rPr sz="1600"/>
+              <a:rPr sz="1600">
+                <a:latin typeface="Calibri"/>
+              </a:rPr>
               <a:t>Exercise 2:  Build the network - choose layers, activations, output shape</a:t>
             </a:r>
           </a:p>
           <a:p>
             <a:r>
-              <a:rPr sz="1600"/>
+              <a:rPr sz="1600">
+                <a:latin typeface="Calibri"/>
+              </a:rPr>
               <a:t>Exercise 3:  Compile and train - model.fit(), history object, training curves</a:t>
             </a:r>
           </a:p>
           <a:p>
             <a:r>
-              <a:rPr sz="1600"/>
+              <a:rPr sz="1600">
+                <a:latin typeface="Calibri"/>
+              </a:rPr>
               <a:t>Exercise 4:  Evaluate and improve - classification report, compare to LR baseline</a:t>
             </a:r>
           </a:p>
           <a:p>
             <a:r>
-              <a:rPr sz="1600"/>
+              <a:rPr sz="1600">
+                <a:latin typeface="Calibri"/>
+              </a:rPr>
               <a:t/>
             </a:r>
           </a:p>
           <a:p>
             <a:r>
-              <a:rPr sz="1600"/>
+              <a:rPr sz="1600">
+                <a:latin typeface="Calibri"/>
+              </a:rPr>
               <a:t>Each exercise: lecture.md + handson.md + solution file</a:t>
             </a:r>
           </a:p>
@@ -8924,37 +9004,49 @@
           <a:lstStyle/>
           <a:p>
             <a:r>
-              <a:rPr sz="1500"/>
+              <a:rPr sz="1500">
+                <a:latin typeface="Calibri"/>
+              </a:rPr>
               <a:t>A neural network is layers of neurons with learnable weights</a:t>
             </a:r>
           </a:p>
           <a:p>
             <a:r>
-              <a:rPr sz="1500"/>
+              <a:rPr sz="1500">
+                <a:latin typeface="Calibri"/>
+              </a:rPr>
               <a:t>Keras: define architecture, compile (loss+optimiser), train (fit)</a:t>
             </a:r>
           </a:p>
           <a:p>
             <a:r>
-              <a:rPr sz="1500"/>
+              <a:rPr sz="1500">
+                <a:latin typeface="Calibri"/>
+              </a:rPr>
               <a:t>Adam optimiser + binary_crossentropy is the standard starting point</a:t>
             </a:r>
           </a:p>
           <a:p>
             <a:r>
-              <a:rPr sz="1500"/>
+              <a:rPr sz="1500">
+                <a:latin typeface="Calibri"/>
+              </a:rPr>
               <a:t>Loss curves are your most important diagnostic - always plot them</a:t>
             </a:r>
           </a:p>
           <a:p>
             <a:r>
-              <a:rPr sz="1500"/>
+              <a:rPr sz="1500">
+                <a:latin typeface="Calibri"/>
+              </a:rPr>
               <a:t>val_loss rising = overfitting, both curves high = underfitting</a:t>
             </a:r>
           </a:p>
           <a:p>
             <a:r>
-              <a:rPr sz="1500"/>
+              <a:rPr sz="1500">
+                <a:latin typeface="Calibri"/>
+              </a:rPr>
               <a:t>Next: Dropout and regularisation - controlling overfitting in deep networks</a:t>
             </a:r>
           </a:p>
@@ -8976,11 +9068,17 @@
           <a:lstStyle/>
           <a:p>
             <a:r>
+              <a:rPr b="1">
+                <a:latin typeface="Calibri"/>
+              </a:rPr>
               <a:t>Key</a:t>
             </a:r>
           </a:p>
           <a:p>
             <a:r>
+              <a:rPr b="1">
+                <a:latin typeface="Calibri"/>
+              </a:rPr>
               <a:t>Takeaways</a:t>
             </a:r>
           </a:p>
@@ -9020,6 +9118,9 @@
           <a:lstStyle/>
           <a:p>
             <a:r>
+              <a:rPr>
+                <a:latin typeface="Calibri"/>
+              </a:rPr>
               <a:t>Next:  Lesson 3.2 - Dropout and Regularisation</a:t>
             </a:r>
           </a:p>
@@ -9041,6 +9142,9 @@
           <a:lstStyle/>
           <a:p>
             <a:r>
+              <a:rPr b="1">
+                <a:latin typeface="Calibri"/>
+              </a:rPr>
               <a:t>Your First Neural Network</a:t>
             </a:r>
           </a:p>
@@ -9080,31 +9184,41 @@
           <a:lstStyle/>
           <a:p>
             <a:r>
-              <a:rPr sz="1600"/>
+              <a:rPr sz="1600">
+                <a:latin typeface="Calibri"/>
+              </a:rPr>
               <a:t>Neural network architecture - layers, neurons, weights</a:t>
             </a:r>
           </a:p>
           <a:p>
             <a:r>
-              <a:rPr sz="1600"/>
+              <a:rPr sz="1600">
+                <a:latin typeface="Calibri"/>
+              </a:rPr>
               <a:t>The three steps: define, compile, train</a:t>
             </a:r>
           </a:p>
           <a:p>
             <a:r>
-              <a:rPr sz="1600"/>
+              <a:rPr sz="1600">
+                <a:latin typeface="Calibri"/>
+              </a:rPr>
               <a:t>Loss functions, optimisers, and epochs</a:t>
             </a:r>
           </a:p>
           <a:p>
             <a:r>
-              <a:rPr sz="1600"/>
+              <a:rPr sz="1600">
+                <a:latin typeface="Calibri"/>
+              </a:rPr>
               <a:t>Reading loss curves - good training vs overfitting</a:t>
             </a:r>
           </a:p>
           <a:p>
             <a:r>
-              <a:rPr sz="1600"/>
+              <a:rPr sz="1600">
+                <a:latin typeface="Calibri"/>
+              </a:rPr>
               <a:t>sklearn vs Keras - when to use which</a:t>
             </a:r>
           </a:p>
@@ -9126,6 +9240,9 @@
           <a:lstStyle/>
           <a:p>
             <a:r>
+              <a:rPr b="1">
+                <a:latin typeface="Calibri"/>
+              </a:rPr>
               <a:t>What We'll Cover</a:t>
             </a:r>
           </a:p>
@@ -9165,11 +9282,17 @@
           <a:lstStyle/>
           <a:p>
             <a:r>
+              <a:rPr b="1">
+                <a:latin typeface="Calibri"/>
+              </a:rPr>
               <a:t>Network</a:t>
             </a:r>
           </a:p>
           <a:p>
             <a:r>
+              <a:rPr b="1">
+                <a:latin typeface="Calibri"/>
+              </a:rPr>
               <a:t>Architecture</a:t>
             </a:r>
           </a:p>
@@ -9191,6 +9314,9 @@
           <a:lstStyle/>
           <a:p>
             <a:r>
+              <a:rPr b="1">
+                <a:latin typeface="Calibri"/>
+              </a:rPr>
               <a:t>01</a:t>
             </a:r>
           </a:p>
@@ -9230,6 +9356,9 @@
           <a:lstStyle/>
           <a:p>
             <a:r>
+              <a:rPr b="1">
+                <a:latin typeface="Calibri"/>
+              </a:rPr>
               <a:t>Layers, Neurons, and Connections</a:t>
             </a:r>
           </a:p>
@@ -9293,6 +9422,9 @@
           <a:lstStyle/>
           <a:p>
             <a:r>
+              <a:rPr b="1">
+                <a:latin typeface="Calibri"/>
+              </a:rPr>
               <a:t>From NumPy to Keras - Same Concept, Less Code</a:t>
             </a:r>
           </a:p>
@@ -9314,55 +9446,73 @@
           <a:lstStyle/>
           <a:p>
             <a:r>
-              <a:rPr sz="1500"/>
+              <a:rPr sz="1500">
+                <a:latin typeface="Calibri"/>
+              </a:rPr>
               <a:t>What you built by hand in foundations:</a:t>
             </a:r>
           </a:p>
           <a:p>
             <a:r>
-              <a:rPr sz="1500"/>
+              <a:rPr sz="1500">
+                <a:latin typeface="Calibri"/>
+              </a:rPr>
               <a:t>  weights = np.random.randn(n_inputs, n_neurons)</a:t>
             </a:r>
           </a:p>
           <a:p>
             <a:r>
-              <a:rPr sz="1500"/>
+              <a:rPr sz="1500">
+                <a:latin typeface="Calibri"/>
+              </a:rPr>
               <a:t>  output = np.dot(inputs, weights) + biases</a:t>
             </a:r>
           </a:p>
           <a:p>
             <a:r>
-              <a:rPr sz="1500"/>
+              <a:rPr sz="1500">
+                <a:latin typeface="Calibri"/>
+              </a:rPr>
               <a:t/>
             </a:r>
           </a:p>
           <a:p>
             <a:r>
-              <a:rPr sz="1500"/>
+              <a:rPr sz="1500">
+                <a:latin typeface="Calibri"/>
+              </a:rPr>
               <a:t>Keras equivalent:</a:t>
             </a:r>
           </a:p>
           <a:p>
             <a:r>
-              <a:rPr sz="1500"/>
+              <a:rPr sz="1500">
+                <a:latin typeface="Calibri"/>
+              </a:rPr>
               <a:t>  keras.layers.Dense(32, activation='relu')</a:t>
             </a:r>
           </a:p>
           <a:p>
             <a:r>
-              <a:rPr sz="1500"/>
+              <a:rPr sz="1500">
+                <a:latin typeface="Calibri"/>
+              </a:rPr>
               <a:t/>
             </a:r>
           </a:p>
           <a:p>
             <a:r>
-              <a:rPr sz="1500"/>
+              <a:rPr sz="1500">
+                <a:latin typeface="Calibri"/>
+              </a:rPr>
               <a:t>Keras handles initialisation, forward pass,</a:t>
             </a:r>
           </a:p>
           <a:p>
             <a:r>
-              <a:rPr sz="1500"/>
+              <a:rPr sz="1500">
+                <a:latin typeface="Calibri"/>
+              </a:rPr>
               <a:t>AND the backward pass (backpropagation) automatically</a:t>
             </a:r>
           </a:p>
@@ -9402,11 +9552,17 @@
           <a:lstStyle/>
           <a:p>
             <a:r>
+              <a:rPr b="1">
+                <a:latin typeface="Calibri"/>
+              </a:rPr>
               <a:t>Define, Compile,</a:t>
             </a:r>
           </a:p>
           <a:p>
             <a:r>
+              <a:rPr b="1">
+                <a:latin typeface="Calibri"/>
+              </a:rPr>
               <a:t>Train</a:t>
             </a:r>
           </a:p>
@@ -9428,6 +9584,9 @@
           <a:lstStyle/>
           <a:p>
             <a:r>
+              <a:rPr b="1">
+                <a:latin typeface="Calibri"/>
+              </a:rPr>
               <a:t>02</a:t>
             </a:r>
           </a:p>
@@ -9467,6 +9626,9 @@
           <a:lstStyle/>
           <a:p>
             <a:r>
+              <a:rPr b="1">
+                <a:latin typeface="Calibri"/>
+              </a:rPr>
               <a:t>Three Steps to Train Any Keras Model</a:t>
             </a:r>
           </a:p>
@@ -9530,6 +9692,9 @@
           <a:lstStyle/>
           <a:p>
             <a:r>
+              <a:rPr b="1">
+                <a:latin typeface="Calibri"/>
+              </a:rPr>
               <a:t>Key Training Concepts</a:t>
             </a:r>
           </a:p>
@@ -9551,49 +9716,65 @@
           <a:lstStyle/>
           <a:p>
             <a:r>
-              <a:rPr sz="1400"/>
+              <a:rPr sz="1400">
+                <a:latin typeface="Calibri"/>
+              </a:rPr>
               <a:t>Epochs</a:t>
             </a:r>
           </a:p>
           <a:p>
             <a:r>
-              <a:rPr sz="1400"/>
+              <a:rPr sz="1400">
+                <a:latin typeface="Calibri"/>
+              </a:rPr>
               <a:t>  One full pass through all data</a:t>
             </a:r>
           </a:p>
           <a:p>
             <a:r>
-              <a:rPr sz="1400"/>
+              <a:rPr sz="1400">
+                <a:latin typeface="Calibri"/>
+              </a:rPr>
               <a:t>  Need many passes to converge</a:t>
             </a:r>
           </a:p>
           <a:p>
             <a:r>
-              <a:rPr sz="1400"/>
+              <a:rPr sz="1400">
+                <a:latin typeface="Calibri"/>
+              </a:rPr>
               <a:t/>
             </a:r>
           </a:p>
           <a:p>
             <a:r>
-              <a:rPr sz="1400"/>
+              <a:rPr sz="1400">
+                <a:latin typeface="Calibri"/>
+              </a:rPr>
               <a:t>Batch size</a:t>
             </a:r>
           </a:p>
           <a:p>
             <a:r>
-              <a:rPr sz="1400"/>
+              <a:rPr sz="1400">
+                <a:latin typeface="Calibri"/>
+              </a:rPr>
               <a:t>  Process 32 samples at a time</a:t>
             </a:r>
           </a:p>
           <a:p>
             <a:r>
-              <a:rPr sz="1400"/>
+              <a:rPr sz="1400">
+                <a:latin typeface="Calibri"/>
+              </a:rPr>
               <a:t>  Update weights after each batch</a:t>
             </a:r>
           </a:p>
           <a:p>
             <a:r>
-              <a:rPr sz="1400"/>
+              <a:rPr sz="1400">
+                <a:latin typeface="Calibri"/>
+              </a:rPr>
               <a:t>  Common: 32, 64, 128</a:t>
             </a:r>
           </a:p>
@@ -9615,49 +9796,65 @@
           <a:lstStyle/>
           <a:p>
             <a:r>
-              <a:rPr sz="1400"/>
+              <a:rPr sz="1400">
+                <a:latin typeface="Calibri"/>
+              </a:rPr>
               <a:t>Optimiser: Adam</a:t>
             </a:r>
           </a:p>
           <a:p>
             <a:r>
-              <a:rPr sz="1400"/>
+              <a:rPr sz="1400">
+                <a:latin typeface="Calibri"/>
+              </a:rPr>
               <a:t>  Adaptive learning rate</a:t>
             </a:r>
           </a:p>
           <a:p>
             <a:r>
-              <a:rPr sz="1400"/>
+              <a:rPr sz="1400">
+                <a:latin typeface="Calibri"/>
+              </a:rPr>
               <a:t>  Default choice for most tasks</a:t>
             </a:r>
           </a:p>
           <a:p>
             <a:r>
-              <a:rPr sz="1400"/>
+              <a:rPr sz="1400">
+                <a:latin typeface="Calibri"/>
+              </a:rPr>
               <a:t/>
             </a:r>
           </a:p>
           <a:p>
             <a:r>
-              <a:rPr sz="1400"/>
+              <a:rPr sz="1400">
+                <a:latin typeface="Calibri"/>
+              </a:rPr>
               <a:t>Loss functions:</a:t>
             </a:r>
           </a:p>
           <a:p>
             <a:r>
-              <a:rPr sz="1400"/>
+              <a:rPr sz="1400">
+                <a:latin typeface="Calibri"/>
+              </a:rPr>
               <a:t>  binary_crossentropy (binary)</a:t>
             </a:r>
           </a:p>
           <a:p>
             <a:r>
-              <a:rPr sz="1400"/>
+              <a:rPr sz="1400">
+                <a:latin typeface="Calibri"/>
+              </a:rPr>
               <a:t>  categorical_crossentropy (multi)</a:t>
             </a:r>
           </a:p>
           <a:p>
             <a:r>
-              <a:rPr sz="1400"/>
+              <a:rPr sz="1400">
+                <a:latin typeface="Calibri"/>
+              </a:rPr>
               <a:t>  mse (regression)</a:t>
             </a:r>
           </a:p>
@@ -9697,11 +9894,17 @@
           <a:lstStyle/>
           <a:p>
             <a:r>
+              <a:rPr b="1">
+                <a:latin typeface="Calibri"/>
+              </a:rPr>
               <a:t>Reading</a:t>
             </a:r>
           </a:p>
           <a:p>
             <a:r>
+              <a:rPr b="1">
+                <a:latin typeface="Calibri"/>
+              </a:rPr>
               <a:t>Loss Curves</a:t>
             </a:r>
           </a:p>
@@ -9723,6 +9926,9 @@
           <a:lstStyle/>
           <a:p>
             <a:r>
+              <a:rPr b="1">
+                <a:latin typeface="Calibri"/>
+              </a:rPr>
               <a:t>03</a:t>
             </a:r>
           </a:p>
